--- a/hearts-and-minds/journey-decks/hm-journey-adam-v1.pptx
+++ b/hearts-and-minds/journey-decks/hm-journey-adam-v1.pptx
@@ -1940,7 +1940,7 @@
       </p:sp>
       <p:pic>
         <p:nvPicPr>
-          <p:cNvPr id="10" name="Image 1" descr="/sessions/quirky-zen-galileo/mnt/outputs/hmdecks/img/adam-portrait.jpg">    </p:cNvPr>
+          <p:cNvPr id="10" name="Image 1" descr="/sessions/quirky-zen-galileo/mnt/outputs/hmdecks5/img/adam-portrait.jpg">    </p:cNvPr>
           <p:cNvPicPr>
             <a:picLocks noChangeAspect="1"/>
           </p:cNvPicPr>
@@ -4382,7 +4382,7 @@
       </p:sp>
       <p:pic>
         <p:nvPicPr>
-          <p:cNvPr id="13" name="Image 1" descr="/sessions/quirky-zen-galileo/mnt/outputs/hmdecks/img/adam-stage1.jpg">    </p:cNvPr>
+          <p:cNvPr id="13" name="Image 1" descr="/sessions/quirky-zen-galileo/mnt/outputs/hmdecks5/img/adam-stage1.jpg">    </p:cNvPr>
           <p:cNvPicPr>
             <a:picLocks noChangeAspect="1"/>
           </p:cNvPicPr>
@@ -5315,7 +5315,7 @@
       </p:sp>
       <p:pic>
         <p:nvPicPr>
-          <p:cNvPr id="13" name="Image 1" descr="/sessions/quirky-zen-galileo/mnt/outputs/hmdecks/img/adam-stage2.jpg">    </p:cNvPr>
+          <p:cNvPr id="13" name="Image 1" descr="/sessions/quirky-zen-galileo/mnt/outputs/hmdecks5/img/adam-stage2.jpg">    </p:cNvPr>
           <p:cNvPicPr>
             <a:picLocks noChangeAspect="1"/>
           </p:cNvPicPr>
@@ -6262,7 +6262,7 @@
       </p:sp>
       <p:pic>
         <p:nvPicPr>
-          <p:cNvPr id="13" name="Image 1" descr="/sessions/quirky-zen-galileo/mnt/outputs/hmdecks/img/adam-stage3.jpg">    </p:cNvPr>
+          <p:cNvPr id="13" name="Image 1" descr="/sessions/quirky-zen-galileo/mnt/outputs/hmdecks5/img/adam-stage3.jpg">    </p:cNvPr>
           <p:cNvPicPr>
             <a:picLocks noChangeAspect="1"/>
           </p:cNvPicPr>
@@ -7195,7 +7195,7 @@
       </p:sp>
       <p:pic>
         <p:nvPicPr>
-          <p:cNvPr id="13" name="Image 1" descr="/sessions/quirky-zen-galileo/mnt/outputs/hmdecks/img/adam-stage4.jpg">    </p:cNvPr>
+          <p:cNvPr id="13" name="Image 1" descr="/sessions/quirky-zen-galileo/mnt/outputs/hmdecks5/img/adam-stage4.jpg">    </p:cNvPr>
           <p:cNvPicPr>
             <a:picLocks noChangeAspect="1"/>
           </p:cNvPicPr>
@@ -8128,7 +8128,7 @@
       </p:sp>
       <p:pic>
         <p:nvPicPr>
-          <p:cNvPr id="13" name="Image 1" descr="/sessions/quirky-zen-galileo/mnt/outputs/hmdecks/img/adam-stage5.jpg">    </p:cNvPr>
+          <p:cNvPr id="13" name="Image 1" descr="/sessions/quirky-zen-galileo/mnt/outputs/hmdecks5/img/adam-stage5.jpg">    </p:cNvPr>
           <p:cNvPicPr>
             <a:picLocks noChangeAspect="1"/>
           </p:cNvPicPr>
@@ -9061,7 +9061,7 @@
       </p:sp>
       <p:pic>
         <p:nvPicPr>
-          <p:cNvPr id="13" name="Image 1" descr="/sessions/quirky-zen-galileo/mnt/outputs/hmdecks/img/adam-stage6.jpg">    </p:cNvPr>
+          <p:cNvPr id="13" name="Image 1" descr="/sessions/quirky-zen-galileo/mnt/outputs/hmdecks5/img/adam-stage6.jpg">    </p:cNvPr>
           <p:cNvPicPr>
             <a:picLocks noChangeAspect="1"/>
           </p:cNvPicPr>
@@ -10035,7 +10035,7 @@
                 <a:ea typeface="Arial" pitchFamily="34" charset="-122"/>
                 <a:cs typeface="Arial" pitchFamily="34" charset="-120"/>
               </a:rPr>
-              <a:t>No money passes through Adam's hands, which is the point. The tests his cohort needs are funded upstream at a set price per activity, so his surveillance list stops competing with his clinics for phlebotomy. What the model buys from Adam is the thing only he can do: the trend review and the escalation call. The economics free his time for exactly that, and the cohort is easier to hold without his job getting worse.</a:t>
+              <a:t>No money passes through Adam's hands, which is the point. The tests his cohort needs are funded upstream at a cost per activity, so his surveillance list stops competing with his clinics for phlebotomy. What the model buys from Adam is the thing only he can do: the trend review and the escalation call. The economics free his time for exactly that, and the cohort is easier to hold without his job getting worse.</a:t>
             </a:r>
             <a:endParaRPr lang="en-US" sz="1150" dirty="0"/>
           </a:p>
